--- a/artifacts/speaking-portfolio-expanded/decks/benchmarks-15min-handout.pptx
+++ b/artifacts/speaking-portfolio-expanded/decks/benchmarks-15min-handout.pptx
@@ -494,7 +494,7 @@
                 <a:ea typeface="Arial"/>
                 <a:cs typeface="Arial"/>
               </a:rPr>
-              <a:t xml:space="preserve">Cohen (1960), [A Coefficient of Agreement for Nominal Scales](https://journals.sagepub.com/doi/abs/10.1177/001316446002000104). Feinstein and Cicchetti (1990), [High agreement but low kappa](https://pubmed.ncbi.nlm.nih.gov/2348207/). [Position bias study](https://arxiv.org/abs/2406.07791); [Self-Preference Bias in LLM-as-a-Judge](https://arxiv.org/abs/2410.21819).</a:t>
+              <a:t xml:space="preserve">Cohen (1960), [A Coefficient of Agreement for Nominal Scales](https://journals.sagepub.com/doi/abs/10.1177/001316446002000104). Feinstein and Cicchetti (1990), [High agreement but low kappa](https://pubmed.ncbi.nlm.nih.gov/2348207/). Shi et al. (2024), [Judging the Judges: position bias in pairwise LLM comparisons](https://arxiv.org/abs/2406.07791). Wataoka et al. (2024), [Self-Preference Bias in LLM-as-a-Judge](https://arxiv.org/abs/2410.21819).</a:t>
             </a:r>
             <a:endParaRPr lang="en-US" sz="1200"/>
           </a:p>
@@ -632,7 +632,7 @@
                 <a:ea typeface="Arial"/>
                 <a:cs typeface="Arial"/>
               </a:rPr>
-              <a:t xml:space="preserve">Bridge: separate held-out evidence, report slices and counts, version the scorer, and set the rejection rule before viewing the candidate.</a:t>
+              <a:t xml:space="preserve">Bridge: separate held-out evidence, report slices and counts, version the scorer, set the rejection rule before viewing the candidate, and use code for state and schema, graders for language, people for disputed policy.</a:t>
             </a:r>
             <a:endParaRPr lang="en-US" sz="1200"/>
           </a:p>
@@ -975,99 +975,99 @@
                 <a:ea typeface="Arial"/>
                 <a:cs typeface="Arial"/>
               </a:rPr>
-              <a:t xml:space="preserve">The suite is an instrument. Test the instrument. Then use it to make a decision.</a:t>
-            </a:r>
-            <a:endParaRPr lang="en-US" sz="1200"/>
-          </a:p>
-          <a:p>
-            <a:pPr marL="0" indent="0">
-              <a:lnSpc>
-                <a:spcPts val="1560"/>
-              </a:lnSpc>
-              <a:spcAft>
-                <a:spcPts val="0"/>
-              </a:spcAft>
-              <a:buNone/>
-            </a:pPr>
-            <a:r>
-              <a:rPr lang="en-US" sz="1200" b="0">
-                <a:solidFill>
-                  <a:srgbClr val="202b33"/>
-                </a:solidFill>
-                <a:latin typeface="Arial"/>
-                <a:ea typeface="Arial"/>
-                <a:cs typeface="Arial"/>
-              </a:rPr>
-              <a:t xml:space="preserve"/>
-            </a:r>
-            <a:endParaRPr lang="en-US" sz="1200"/>
-          </a:p>
-          <a:p>
-            <a:pPr marL="0" indent="0">
-              <a:lnSpc>
-                <a:spcPts val="1560"/>
-              </a:lnSpc>
-              <a:spcAft>
-                <a:spcPts val="0"/>
-              </a:spcAft>
-              <a:buNone/>
-            </a:pPr>
-            <a:r>
-              <a:rPr lang="en-US" sz="1200" b="0">
-                <a:solidFill>
-                  <a:srgbClr val="202b33"/>
-                </a:solidFill>
-                <a:latin typeface="Arial"/>
-                <a:ea typeface="Arial"/>
-                <a:cs typeface="Arial"/>
-              </a:rPr>
-              <a:t xml:space="preserve"/>
-            </a:r>
-            <a:endParaRPr lang="en-US" sz="1200"/>
-          </a:p>
-          <a:p>
-            <a:pPr marL="0" indent="0">
-              <a:lnSpc>
-                <a:spcPts val="1560"/>
-              </a:lnSpc>
-              <a:spcAft>
-                <a:spcPts val="0"/>
-              </a:spcAft>
-              <a:buNone/>
-            </a:pPr>
-            <a:r>
-              <a:rPr lang="en-US" sz="1200" b="0">
-                <a:solidFill>
-                  <a:srgbClr val="202b33"/>
-                </a:solidFill>
-                <a:latin typeface="Arial"/>
-                <a:ea typeface="Arial"/>
-                <a:cs typeface="Arial"/>
-              </a:rPr>
-              <a:t xml:space="preserve"/>
-            </a:r>
-            <a:endParaRPr lang="en-US" sz="1200"/>
-          </a:p>
-          <a:p>
-            <a:pPr marL="0" indent="0">
-              <a:lnSpc>
-                <a:spcPts val="1560"/>
-              </a:lnSpc>
-              <a:spcAft>
-                <a:spcPts val="0"/>
-              </a:spcAft>
-              <a:buNone/>
-            </a:pPr>
-            <a:r>
-              <a:rPr lang="en-US" sz="1200" b="0">
-                <a:solidFill>
-                  <a:srgbClr val="202b33"/>
-                </a:solidFill>
-                <a:latin typeface="Arial"/>
-                <a:ea typeface="Arial"/>
-                <a:cs typeface="Arial"/>
-              </a:rPr>
-              <a:t xml:space="preserve"/>
+              <a:t xml:space="preserve">The suite is an instrument. Test the instrument.</a:t>
+            </a:r>
+            <a:endParaRPr lang="en-US" sz="1200"/>
+          </a:p>
+          <a:p>
+            <a:pPr marL="0" indent="0">
+              <a:lnSpc>
+                <a:spcPts val="1560"/>
+              </a:lnSpc>
+              <a:spcAft>
+                <a:spcPts val="0"/>
+              </a:spcAft>
+              <a:buNone/>
+            </a:pPr>
+            <a:r>
+              <a:rPr lang="en-US" sz="1200" b="0">
+                <a:solidFill>
+                  <a:srgbClr val="202b33"/>
+                </a:solidFill>
+                <a:latin typeface="Arial"/>
+                <a:ea typeface="Arial"/>
+                <a:cs typeface="Arial"/>
+              </a:rPr>
+              <a:t xml:space="preserve"/>
+            </a:r>
+            <a:endParaRPr lang="en-US" sz="1200"/>
+          </a:p>
+          <a:p>
+            <a:pPr marL="0" indent="0">
+              <a:lnSpc>
+                <a:spcPts val="1560"/>
+              </a:lnSpc>
+              <a:spcAft>
+                <a:spcPts val="0"/>
+              </a:spcAft>
+              <a:buNone/>
+            </a:pPr>
+            <a:r>
+              <a:rPr lang="en-US" sz="1200" b="0">
+                <a:solidFill>
+                  <a:srgbClr val="202b33"/>
+                </a:solidFill>
+                <a:latin typeface="Arial"/>
+                <a:ea typeface="Arial"/>
+                <a:cs typeface="Arial"/>
+              </a:rPr>
+              <a:t xml:space="preserve"/>
+            </a:r>
+            <a:endParaRPr lang="en-US" sz="1200"/>
+          </a:p>
+          <a:p>
+            <a:pPr marL="0" indent="0">
+              <a:lnSpc>
+                <a:spcPts val="1560"/>
+              </a:lnSpc>
+              <a:spcAft>
+                <a:spcPts val="0"/>
+              </a:spcAft>
+              <a:buNone/>
+            </a:pPr>
+            <a:r>
+              <a:rPr lang="en-US" sz="1200" b="0">
+                <a:solidFill>
+                  <a:srgbClr val="202b33"/>
+                </a:solidFill>
+                <a:latin typeface="Arial"/>
+                <a:ea typeface="Arial"/>
+                <a:cs typeface="Arial"/>
+              </a:rPr>
+              <a:t xml:space="preserve"/>
+            </a:r>
+            <a:endParaRPr lang="en-US" sz="1200"/>
+          </a:p>
+          <a:p>
+            <a:pPr marL="0" indent="0">
+              <a:lnSpc>
+                <a:spcPts val="1560"/>
+              </a:lnSpc>
+              <a:spcAft>
+                <a:spcPts val="0"/>
+              </a:spcAft>
+              <a:buNone/>
+            </a:pPr>
+            <a:r>
+              <a:rPr lang="en-US" sz="1200" b="0">
+                <a:solidFill>
+                  <a:srgbClr val="202b33"/>
+                </a:solidFill>
+                <a:latin typeface="Arial"/>
+                <a:ea typeface="Arial"/>
+                <a:cs typeface="Arial"/>
+              </a:rPr>
+              <a:t xml:space="preserve">Stop talking.</a:t>
             </a:r>
             <a:endParaRPr lang="en-US" sz="1200"/>
           </a:p>
@@ -1180,7 +1180,7 @@
                 <a:ea typeface="Arial"/>
                 <a:cs typeface="Arial"/>
               </a:rPr>
-              <a:t xml:space="preserve">Campbell (1979), [Assessing the impact of planned social change](https://doi.org/10.1016/0149-7189%2879%2990048-X). Strathern (1997), [Improving ratings](https://gwern.net/doc/statistics/decision/1997-strathern.pdf), European Review 5(3), 305–321. Formulations above are paraphrases.</a:t>
+              <a:t xml:space="preserve">Goodhart (1975), Problems of Monetary Management: The U.K. Experience, Reserve Bank of Australia conference paper (reprinted 1981). Campbell (1979), [Assessing the impact of planned social change](https://doi.org/10.1016/0149-7189%2879%2990048-X). Strathern (1997), [Improving ratings](https://gwern.net/doc/statistics/decision/1997-strathern.pdf), European Review 5(3), 305–321. Formulations above are attributed paraphrases, not claims that every optimized benchmark has stopped measuring anything.</a:t>
             </a:r>
             <a:endParaRPr lang="en-US" sz="1200"/>
           </a:p>
@@ -1272,7 +1272,7 @@
                 <a:ea typeface="Arial"/>
                 <a:cs typeface="Arial"/>
               </a:rPr>
-              <a:t xml:space="preserve">Dan Levy, [Auto-Tune Your LLM Judge](https://danlevy.net/auto-tune-your-llm-judge/), supplied article. The sequence is reused as a teaching fixture, not a fresh measurement.</a:t>
+              <a:t xml:space="preserve">Dan Levy, [Auto-Tune Your LLM Judge](https://danlevy.net/auto-tune-your-llm-judge/), danlevy.net, 11 August 2026. The sequence is reused as a teaching fixture, not a fresh measurement.</a:t>
             </a:r>
             <a:endParaRPr lang="en-US" sz="1200"/>
           </a:p>
@@ -1364,7 +1364,7 @@
                 <a:ea typeface="Arial"/>
                 <a:cs typeface="Arial"/>
               </a:rPr>
-              <a:t xml:space="preserve">Cohen (1960), [A Coefficient of Agreement for Nominal Scales](https://journals.sagepub.com/doi/abs/10.1177/001316446002000104). Feinstein and Cicchetti (1990), [High agreement but low kappa](https://pubmed.ncbi.nlm.nih.gov/2348207/). [Position bias study](https://arxiv.org/abs/2406.07791); [Self-Preference Bias in LLM-as-a-Judge](https://arxiv.org/abs/2410.21819).</a:t>
+              <a:t xml:space="preserve">Cohen (1960), [A Coefficient of Agreement for Nominal Scales](https://journals.sagepub.com/doi/abs/10.1177/001316446002000104). Feinstein and Cicchetti (1990), [High agreement but low kappa](https://pubmed.ncbi.nlm.nih.gov/2348207/). Shi et al. (2024), [Judging the Judges: position bias in pairwise LLM comparisons](https://arxiv.org/abs/2406.07791). Wataoka et al. (2024), [Self-Preference Bias in LLM-as-a-Judge](https://arxiv.org/abs/2410.21819).</a:t>
             </a:r>
             <a:endParaRPr lang="en-US" sz="1200"/>
           </a:p>
@@ -1431,7 +1431,7 @@
                 <a:ea typeface="Arial"/>
                 <a:cs typeface="Arial"/>
               </a:rPr>
-              <a:t xml:space="preserve">Campbell (1979), [Assessing the impact of planned social change](https://doi.org/10.1016/0149-7189%2879%2990048-X). Strathern (1997), [Improving ratings](https://gwern.net/doc/statistics/decision/1997-strathern.pdf), European Review 5(3), 305–321. Formulations above are paraphrases.</a:t>
+              <a:t xml:space="preserve">Goodhart (1975), Problems of Monetary Management: The U.K. Experience, Reserve Bank of Australia conference paper (reprinted 1981). Campbell (1979), [Assessing the impact of planned social change](https://doi.org/10.1016/0149-7189%2879%2990048-X). Strathern (1997), [Improving ratings](https://gwern.net/doc/statistics/decision/1997-strathern.pdf), European Review 5(3), 305–321. Formulations above are attributed paraphrases, not claims that every optimized benchmark has stopped measuring anything.</a:t>
             </a:r>
             <a:endParaRPr lang="en-US" sz="1200"/>
           </a:p>
@@ -1523,7 +1523,7 @@
                 <a:ea typeface="Arial"/>
                 <a:cs typeface="Arial"/>
               </a:rPr>
-              <a:t xml:space="preserve">Dan Levy, [Auto-Tune Your LLM Judge](https://danlevy.net/auto-tune-your-llm-judge/), supplied article. The sequence is reused as a teaching fixture, not a fresh measurement.</a:t>
+              <a:t xml:space="preserve">Dan Levy, [Auto-Tune Your LLM Judge](https://danlevy.net/auto-tune-your-llm-judge/), danlevy.net, 11 August 2026. The sequence is reused as a teaching fixture, not a fresh measurement.</a:t>
             </a:r>
             <a:endParaRPr lang="en-US" sz="1200"/>
           </a:p>
@@ -1615,7 +1615,7 @@
                 <a:ea typeface="Arial"/>
                 <a:cs typeface="Arial"/>
               </a:rPr>
-              <a:t xml:space="preserve">Cohen (1960), [A Coefficient of Agreement for Nominal Scales](https://journals.sagepub.com/doi/abs/10.1177/001316446002000104). Feinstein and Cicchetti (1990), [High agreement but low kappa](https://pubmed.ncbi.nlm.nih.gov/2348207/). [Position bias study](https://arxiv.org/abs/2406.07791); [Self-Preference Bias in LLM-as-a-Judge](https://arxiv.org/abs/2410.21819).</a:t>
+              <a:t xml:space="preserve">Cohen (1960), [A Coefficient of Agreement for Nominal Scales](https://journals.sagepub.com/doi/abs/10.1177/001316446002000104). Feinstein and Cicchetti (1990), [High agreement but low kappa](https://pubmed.ncbi.nlm.nih.gov/2348207/). Shi et al. (2024), [Judging the Judges: position bias in pairwise LLM comparisons](https://arxiv.org/abs/2406.07791). Wataoka et al. (2024), [Self-Preference Bias in LLM-as-a-Judge](https://arxiv.org/abs/2410.21819).</a:t>
             </a:r>
             <a:endParaRPr lang="en-US" sz="1200"/>
           </a:p>
@@ -2531,7 +2531,7 @@
                 <a:ea typeface="Arial"/>
                 <a:cs typeface="Arial"/>
               </a:rPr>
-              <a:t xml:space="preserve">Campbell (1979), [Assessing the impact of planned social change](https://doi.org/10.1016/0149-7189%2879%2990048-X). Strathern (1997), [Improving ratings](https://gwern.net/doc/statistics/decision/1997-strathern.pdf), European Review 5(3), 305–321. Formulations above are paraphrases.</a:t>
+              <a:t xml:space="preserve">Goodhart (1975), Problems of Monetary Management: The U.K. Experience, Reserve Bank of Australia conference paper (reprinted 1981). Campbell (1979), [Assessing the impact of planned social change](https://doi.org/10.1016/0149-7189%2879%2990048-X). Strathern (1997), [Improving ratings](https://gwern.net/doc/statistics/decision/1997-strathern.pdf), European Review 5(3), 305–321. Formulations above are attributed paraphrases, not claims that every optimized benchmark has stopped measuring anything.</a:t>
             </a:r>
             <a:endParaRPr lang="en-US" sz="1200"/>
           </a:p>
@@ -4593,7 +4593,7 @@
                 <a:ea typeface="Arial"/>
                 <a:cs typeface="Arial"/>
               </a:rPr>
-              <a:t xml:space="preserve">Dan Levy, [Auto-Tune Your LLM Judge](https://danlevy.net/auto-tune-your-llm-judge/), supplied article. The sequence is reused as a teaching fixture, not a fresh measurement.</a:t>
+              <a:t xml:space="preserve">Dan Levy, [Auto-Tune Your LLM Judge](https://danlevy.net/auto-tune-your-llm-judge/), danlevy.net, 11 August 2026. The sequence is reused as a teaching fixture, not a fresh measurement.</a:t>
             </a:r>
             <a:endParaRPr lang="en-US" sz="1200"/>
           </a:p>
@@ -6437,7 +6437,7 @@
                 <a:ea typeface="Arial"/>
                 <a:cs typeface="Arial"/>
               </a:rPr>
-              <a:t xml:space="preserve">Your grader is an instrument too</a:t>
+              <a:t xml:space="preserve">Agreeable to a Fault (κ = 0)</a:t>
             </a:r>
             <a:endParaRPr lang="en-US" sz="2550"/>
           </a:p>
@@ -7874,7 +7874,7 @@
                 <a:ea typeface="Arial"/>
                 <a:cs typeface="Arial"/>
               </a:rPr>
-              <a:t xml:space="preserve">instrument. Then use it to make a decision.</a:t>
+              <a:t xml:space="preserve">instrument.</a:t>
             </a:r>
             <a:endParaRPr lang="en-US" sz="1500"/>
           </a:p>
@@ -8152,30 +8152,122 @@
                 <a:ea typeface="Arial"/>
                 <a:cs typeface="Arial"/>
               </a:rPr>
-              <a:t xml:space="preserve">Campbell (1979), Assessing the impact of</a:t>
-            </a:r>
-            <a:endParaRPr lang="en-US" sz="1500"/>
-          </a:p>
-          <a:p>
-            <a:pPr marL="0" indent="0">
-              <a:lnSpc>
-                <a:spcPts val="1950"/>
-              </a:lnSpc>
-              <a:spcAft>
-                <a:spcPts val="0"/>
-              </a:spcAft>
-              <a:buNone/>
-            </a:pPr>
-            <a:r>
-              <a:rPr lang="en-US" sz="1500" b="0">
-                <a:solidFill>
-                  <a:srgbClr val="202B33"/>
-                </a:solidFill>
-                <a:latin typeface="Arial"/>
-                <a:ea typeface="Arial"/>
-                <a:cs typeface="Arial"/>
-              </a:rPr>
-              <a:t xml:space="preserve">planned social change —</a:t>
+              <a:t xml:space="preserve">Goodhart (1975), Problems of Monetary</a:t>
+            </a:r>
+            <a:endParaRPr lang="en-US" sz="1500"/>
+          </a:p>
+          <a:p>
+            <a:pPr marL="0" indent="0">
+              <a:lnSpc>
+                <a:spcPts val="1950"/>
+              </a:lnSpc>
+              <a:spcAft>
+                <a:spcPts val="0"/>
+              </a:spcAft>
+              <a:buNone/>
+            </a:pPr>
+            <a:r>
+              <a:rPr lang="en-US" sz="1500" b="0">
+                <a:solidFill>
+                  <a:srgbClr val="202B33"/>
+                </a:solidFill>
+                <a:latin typeface="Arial"/>
+                <a:ea typeface="Arial"/>
+                <a:cs typeface="Arial"/>
+              </a:rPr>
+              <a:t xml:space="preserve">Management: The U.K. Experience, Reserve</a:t>
+            </a:r>
+            <a:endParaRPr lang="en-US" sz="1500"/>
+          </a:p>
+          <a:p>
+            <a:pPr marL="0" indent="0">
+              <a:lnSpc>
+                <a:spcPts val="1950"/>
+              </a:lnSpc>
+              <a:spcAft>
+                <a:spcPts val="0"/>
+              </a:spcAft>
+              <a:buNone/>
+            </a:pPr>
+            <a:r>
+              <a:rPr lang="en-US" sz="1500" b="0">
+                <a:solidFill>
+                  <a:srgbClr val="202B33"/>
+                </a:solidFill>
+                <a:latin typeface="Arial"/>
+                <a:ea typeface="Arial"/>
+                <a:cs typeface="Arial"/>
+              </a:rPr>
+              <a:t xml:space="preserve">Bank of Australia conference paper</a:t>
+            </a:r>
+            <a:endParaRPr lang="en-US" sz="1500"/>
+          </a:p>
+          <a:p>
+            <a:pPr marL="0" indent="0">
+              <a:lnSpc>
+                <a:spcPts val="1950"/>
+              </a:lnSpc>
+              <a:spcAft>
+                <a:spcPts val="0"/>
+              </a:spcAft>
+              <a:buNone/>
+            </a:pPr>
+            <a:r>
+              <a:rPr lang="en-US" sz="1500" b="0">
+                <a:solidFill>
+                  <a:srgbClr val="202B33"/>
+                </a:solidFill>
+                <a:latin typeface="Arial"/>
+                <a:ea typeface="Arial"/>
+                <a:cs typeface="Arial"/>
+              </a:rPr>
+              <a:t xml:space="preserve">(reprinted 1981). Campbell (1979),</a:t>
+            </a:r>
+            <a:endParaRPr lang="en-US" sz="1500"/>
+          </a:p>
+          <a:p>
+            <a:pPr marL="0" indent="0">
+              <a:lnSpc>
+                <a:spcPts val="1950"/>
+              </a:lnSpc>
+              <a:spcAft>
+                <a:spcPts val="0"/>
+              </a:spcAft>
+              <a:buNone/>
+            </a:pPr>
+            <a:r>
+              <a:rPr lang="en-US" sz="1500" b="0">
+                <a:solidFill>
+                  <a:srgbClr val="202B33"/>
+                </a:solidFill>
+                <a:latin typeface="Arial"/>
+                <a:ea typeface="Arial"/>
+                <a:cs typeface="Arial"/>
+              </a:rPr>
+              <a:t xml:space="preserve">Assessing the impact of planned social</a:t>
+            </a:r>
+            <a:endParaRPr lang="en-US" sz="1500"/>
+          </a:p>
+          <a:p>
+            <a:pPr marL="0" indent="0">
+              <a:lnSpc>
+                <a:spcPts val="1950"/>
+              </a:lnSpc>
+              <a:spcAft>
+                <a:spcPts val="0"/>
+              </a:spcAft>
+              <a:buNone/>
+            </a:pPr>
+            <a:r>
+              <a:rPr lang="en-US" sz="1500" b="0">
+                <a:solidFill>
+                  <a:srgbClr val="202B33"/>
+                </a:solidFill>
+                <a:latin typeface="Arial"/>
+                <a:ea typeface="Arial"/>
+                <a:cs typeface="Arial"/>
+              </a:rPr>
+              <a:t xml:space="preserve">change —</a:t>
             </a:r>
             <a:endParaRPr lang="en-US" sz="1500"/>
           </a:p>
@@ -8290,7 +8382,53 @@
                 <a:ea typeface="Arial"/>
                 <a:cs typeface="Arial"/>
               </a:rPr>
-              <a:t xml:space="preserve">above are paraphrases.</a:t>
+              <a:t xml:space="preserve">above are attributed paraphrases, not</a:t>
+            </a:r>
+            <a:endParaRPr lang="en-US" sz="1500"/>
+          </a:p>
+          <a:p>
+            <a:pPr marL="0" indent="0">
+              <a:lnSpc>
+                <a:spcPts val="1950"/>
+              </a:lnSpc>
+              <a:spcAft>
+                <a:spcPts val="0"/>
+              </a:spcAft>
+              <a:buNone/>
+            </a:pPr>
+            <a:r>
+              <a:rPr lang="en-US" sz="1500" b="0">
+                <a:solidFill>
+                  <a:srgbClr val="202B33"/>
+                </a:solidFill>
+                <a:latin typeface="Arial"/>
+                <a:ea typeface="Arial"/>
+                <a:cs typeface="Arial"/>
+              </a:rPr>
+              <a:t xml:space="preserve">claims that every optimized benchmark has</a:t>
+            </a:r>
+            <a:endParaRPr lang="en-US" sz="1500"/>
+          </a:p>
+          <a:p>
+            <a:pPr marL="0" indent="0">
+              <a:lnSpc>
+                <a:spcPts val="1950"/>
+              </a:lnSpc>
+              <a:spcAft>
+                <a:spcPts val="0"/>
+              </a:spcAft>
+              <a:buNone/>
+            </a:pPr>
+            <a:r>
+              <a:rPr lang="en-US" sz="1500" b="0">
+                <a:solidFill>
+                  <a:srgbClr val="202B33"/>
+                </a:solidFill>
+                <a:latin typeface="Arial"/>
+                <a:ea typeface="Arial"/>
+                <a:cs typeface="Arial"/>
+              </a:rPr>
+              <a:t xml:space="preserve">stopped measuring anything.</a:t>
             </a:r>
             <a:endParaRPr lang="en-US" sz="1500"/>
           </a:p>
@@ -8429,75 +8567,6 @@
                 <a:cs typeface="Arial"/>
               </a:rPr>
               <a:t xml:space="preserve">Interpretation and</a:t>
-            </a:r>
-            <a:endParaRPr lang="en-US" sz="1500"/>
-          </a:p>
-          <a:p>
-            <a:pPr marL="0" indent="0">
-              <a:lnSpc>
-                <a:spcPts val="1950"/>
-              </a:lnSpc>
-              <a:spcAft>
-                <a:spcPts val="0"/>
-              </a:spcAft>
-              <a:buNone/>
-            </a:pPr>
-            <a:r>
-              <a:rPr lang="en-US" sz="1500" b="0">
-                <a:solidFill>
-                  <a:srgbClr val="202B33"/>
-                </a:solidFill>
-                <a:latin typeface="Arial"/>
-                <a:ea typeface="Arial"/>
-                <a:cs typeface="Arial"/>
-              </a:rPr>
-              <a:t xml:space="preserve">Use](https://www.ets.org/research/policy_research_reports/publications/report/1990/ihmy.html).</a:t>
-            </a:r>
-            <a:endParaRPr lang="en-US" sz="1500"/>
-          </a:p>
-          <a:p>
-            <a:pPr marL="0" indent="0">
-              <a:lnSpc>
-                <a:spcPts val="1950"/>
-              </a:lnSpc>
-              <a:spcAft>
-                <a:spcPts val="0"/>
-              </a:spcAft>
-              <a:buNone/>
-            </a:pPr>
-            <a:r>
-              <a:rPr lang="en-US" sz="1500" b="0">
-                <a:solidFill>
-                  <a:srgbClr val="202B33"/>
-                </a:solidFill>
-                <a:latin typeface="Arial"/>
-                <a:ea typeface="Arial"/>
-                <a:cs typeface="Arial"/>
-              </a:rPr>
-              <a:t xml:space="preserve">Raji et al. (2021), [AI and the Everything</a:t>
-            </a:r>
-            <a:endParaRPr lang="en-US" sz="1500"/>
-          </a:p>
-          <a:p>
-            <a:pPr marL="0" indent="0">
-              <a:lnSpc>
-                <a:spcPts val="1950"/>
-              </a:lnSpc>
-              <a:spcAft>
-                <a:spcPts val="0"/>
-              </a:spcAft>
-              <a:buNone/>
-            </a:pPr>
-            <a:r>
-              <a:rPr lang="en-US" sz="1500" b="0">
-                <a:solidFill>
-                  <a:srgbClr val="202B33"/>
-                </a:solidFill>
-                <a:latin typeface="Arial"/>
-                <a:ea typeface="Arial"/>
-                <a:cs typeface="Arial"/>
-              </a:rPr>
-              <a:t xml:space="preserve">in the Whole Wide World</a:t>
             </a:r>
             <a:endParaRPr lang="en-US" sz="1500"/>
           </a:p>
@@ -8546,6 +8615,75 @@
                 <a:ea typeface="Arial"/>
                 <a:cs typeface="Arial"/>
               </a:rPr>
+              <a:t xml:space="preserve">Use](https://www.ets.org/research/policy_research_reports/publications/report/1990/ihmy.html).</a:t>
+            </a:r>
+            <a:endParaRPr lang="en-US" sz="1500"/>
+          </a:p>
+          <a:p>
+            <a:pPr marL="0" indent="0">
+              <a:lnSpc>
+                <a:spcPts val="1950"/>
+              </a:lnSpc>
+              <a:spcAft>
+                <a:spcPts val="0"/>
+              </a:spcAft>
+              <a:buNone/>
+            </a:pPr>
+            <a:r>
+              <a:rPr lang="en-US" sz="1500" b="0">
+                <a:solidFill>
+                  <a:srgbClr val="202B33"/>
+                </a:solidFill>
+                <a:latin typeface="Arial"/>
+                <a:ea typeface="Arial"/>
+                <a:cs typeface="Arial"/>
+              </a:rPr>
+              <a:t xml:space="preserve">Raji et al. (2021), [AI and the Everything</a:t>
+            </a:r>
+            <a:endParaRPr lang="en-US" sz="1500"/>
+          </a:p>
+          <a:p>
+            <a:pPr marL="0" indent="0">
+              <a:lnSpc>
+                <a:spcPts val="1950"/>
+              </a:lnSpc>
+              <a:spcAft>
+                <a:spcPts val="0"/>
+              </a:spcAft>
+              <a:buNone/>
+            </a:pPr>
+            <a:r>
+              <a:rPr lang="en-US" sz="1500" b="0">
+                <a:solidFill>
+                  <a:srgbClr val="202B33"/>
+                </a:solidFill>
+                <a:latin typeface="Arial"/>
+                <a:ea typeface="Arial"/>
+                <a:cs typeface="Arial"/>
+              </a:rPr>
+              <a:t xml:space="preserve">in the Whole Wide World</a:t>
+            </a:r>
+            <a:endParaRPr lang="en-US" sz="1500"/>
+          </a:p>
+          <a:p>
+            <a:pPr marL="0" indent="0">
+              <a:lnSpc>
+                <a:spcPts val="1950"/>
+              </a:lnSpc>
+              <a:spcAft>
+                <a:spcPts val="0"/>
+              </a:spcAft>
+              <a:buNone/>
+            </a:pPr>
+            <a:r>
+              <a:rPr lang="en-US" sz="1500" b="0">
+                <a:solidFill>
+                  <a:srgbClr val="202B33"/>
+                </a:solidFill>
+                <a:latin typeface="Arial"/>
+                <a:ea typeface="Arial"/>
+                <a:cs typeface="Arial"/>
+              </a:rPr>
               <a:t xml:space="preserve">Benchmark](https://datasets-benchmarks-proceedings.neurips.cc/paper/2021/hash/084b6fbb10729ed4da8c3d3f5a3ae7c9-Abstract-round2.html.</a:t>
             </a:r>
             <a:endParaRPr lang="en-US" sz="1500"/>
@@ -8638,53 +8776,53 @@
                 <a:ea typeface="Arial"/>
                 <a:cs typeface="Arial"/>
               </a:rPr>
-              <a:t xml:space="preserve">supplied article. The sequence is reused as</a:t>
-            </a:r>
-            <a:endParaRPr lang="en-US" sz="1500"/>
-          </a:p>
-          <a:p>
-            <a:pPr marL="0" indent="0">
-              <a:lnSpc>
-                <a:spcPts val="1950"/>
-              </a:lnSpc>
-              <a:spcAft>
-                <a:spcPts val="0"/>
-              </a:spcAft>
-              <a:buNone/>
-            </a:pPr>
-            <a:r>
-              <a:rPr lang="en-US" sz="1500" b="0">
-                <a:solidFill>
-                  <a:srgbClr val="202B33"/>
-                </a:solidFill>
-                <a:latin typeface="Arial"/>
-                <a:ea typeface="Arial"/>
-                <a:cs typeface="Arial"/>
-              </a:rPr>
-              <a:t xml:space="preserve">a teaching fixture, not a fresh</a:t>
-            </a:r>
-            <a:endParaRPr lang="en-US" sz="1500"/>
-          </a:p>
-          <a:p>
-            <a:pPr marL="0" indent="0">
-              <a:lnSpc>
-                <a:spcPts val="1950"/>
-              </a:lnSpc>
-              <a:spcAft>
-                <a:spcPts val="0"/>
-              </a:spcAft>
-              <a:buNone/>
-            </a:pPr>
-            <a:r>
-              <a:rPr lang="en-US" sz="1500" b="0">
-                <a:solidFill>
-                  <a:srgbClr val="202B33"/>
-                </a:solidFill>
-                <a:latin typeface="Arial"/>
-                <a:ea typeface="Arial"/>
-                <a:cs typeface="Arial"/>
-              </a:rPr>
-              <a:t xml:space="preserve">measurement.</a:t>
+              <a:t xml:space="preserve">danlevy.net, 11 August 2026. The sequence</a:t>
+            </a:r>
+            <a:endParaRPr lang="en-US" sz="1500"/>
+          </a:p>
+          <a:p>
+            <a:pPr marL="0" indent="0">
+              <a:lnSpc>
+                <a:spcPts val="1950"/>
+              </a:lnSpc>
+              <a:spcAft>
+                <a:spcPts val="0"/>
+              </a:spcAft>
+              <a:buNone/>
+            </a:pPr>
+            <a:r>
+              <a:rPr lang="en-US" sz="1500" b="0">
+                <a:solidFill>
+                  <a:srgbClr val="202B33"/>
+                </a:solidFill>
+                <a:latin typeface="Arial"/>
+                <a:ea typeface="Arial"/>
+                <a:cs typeface="Arial"/>
+              </a:rPr>
+              <a:t xml:space="preserve">is reused as a teaching fixture, not a</a:t>
+            </a:r>
+            <a:endParaRPr lang="en-US" sz="1500"/>
+          </a:p>
+          <a:p>
+            <a:pPr marL="0" indent="0">
+              <a:lnSpc>
+                <a:spcPts val="1950"/>
+              </a:lnSpc>
+              <a:spcAft>
+                <a:spcPts val="0"/>
+              </a:spcAft>
+              <a:buNone/>
+            </a:pPr>
+            <a:r>
+              <a:rPr lang="en-US" sz="1500" b="0">
+                <a:solidFill>
+                  <a:srgbClr val="202B33"/>
+                </a:solidFill>
+                <a:latin typeface="Arial"/>
+                <a:ea typeface="Arial"/>
+                <a:cs typeface="Arial"/>
+              </a:rPr>
+              <a:t xml:space="preserve">fresh measurement.</a:t>
             </a:r>
             <a:endParaRPr lang="en-US" sz="1500"/>
           </a:p>
@@ -9265,6 +9403,29 @@
             </a:r>
             <a:endParaRPr lang="en-US" sz="1500"/>
           </a:p>
+          <a:p>
+            <a:pPr marL="0" indent="0">
+              <a:lnSpc>
+                <a:spcPts val="1950"/>
+              </a:lnSpc>
+              <a:spcAft>
+                <a:spcPts val="0"/>
+              </a:spcAft>
+              <a:buNone/>
+            </a:pPr>
+            <a:r>
+              <a:rPr lang="en-US" sz="1500" b="0">
+                <a:solidFill>
+                  <a:srgbClr val="202B33"/>
+                </a:solidFill>
+                <a:latin typeface="Arial"/>
+                <a:ea typeface="Arial"/>
+                <a:cs typeface="Arial"/>
+              </a:rPr>
+              <a:t xml:space="preserve">kappa](https://pubmed.ncbi.nlm.nih.gov/2348207/).</a:t>
+            </a:r>
+            <a:endParaRPr lang="en-US" sz="1500"/>
+          </a:p>
         </p:txBody>
       </p:sp>
       <p:sp>
@@ -9310,76 +9471,99 @@
                 <a:ea typeface="Arial"/>
                 <a:cs typeface="Arial"/>
               </a:rPr>
-              <a:t xml:space="preserve">kappa](https://pubmed.ncbi.nlm.nih.gov/2348207/).</a:t>
-            </a:r>
-            <a:endParaRPr lang="en-US" sz="1500"/>
-          </a:p>
-          <a:p>
-            <a:pPr marL="0" indent="0">
-              <a:lnSpc>
-                <a:spcPts val="1950"/>
-              </a:lnSpc>
-              <a:spcAft>
-                <a:spcPts val="0"/>
-              </a:spcAft>
-              <a:buNone/>
-            </a:pPr>
-            <a:r>
-              <a:rPr lang="en-US" sz="1500" b="0">
-                <a:solidFill>
-                  <a:srgbClr val="202B33"/>
-                </a:solidFill>
-                <a:latin typeface="Arial"/>
-                <a:ea typeface="Arial"/>
-                <a:cs typeface="Arial"/>
-              </a:rPr>
-              <a:t xml:space="preserve">[Position bias</a:t>
-            </a:r>
-            <a:endParaRPr lang="en-US" sz="1500"/>
-          </a:p>
-          <a:p>
-            <a:pPr marL="0" indent="0">
-              <a:lnSpc>
-                <a:spcPts val="1950"/>
-              </a:lnSpc>
-              <a:spcAft>
-                <a:spcPts val="0"/>
-              </a:spcAft>
-              <a:buNone/>
-            </a:pPr>
-            <a:r>
-              <a:rPr lang="en-US" sz="1500" b="0">
-                <a:solidFill>
-                  <a:srgbClr val="202B33"/>
-                </a:solidFill>
-                <a:latin typeface="Arial"/>
-                <a:ea typeface="Arial"/>
-                <a:cs typeface="Arial"/>
-              </a:rPr>
-              <a:t xml:space="preserve">study](https://arxiv.org/abs/2406.07791);</a:t>
-            </a:r>
-            <a:endParaRPr lang="en-US" sz="1500"/>
-          </a:p>
-          <a:p>
-            <a:pPr marL="0" indent="0">
-              <a:lnSpc>
-                <a:spcPts val="1950"/>
-              </a:lnSpc>
-              <a:spcAft>
-                <a:spcPts val="0"/>
-              </a:spcAft>
-              <a:buNone/>
-            </a:pPr>
-            <a:r>
-              <a:rPr lang="en-US" sz="1500" b="0">
-                <a:solidFill>
-                  <a:srgbClr val="202B33"/>
-                </a:solidFill>
-                <a:latin typeface="Arial"/>
-                <a:ea typeface="Arial"/>
-                <a:cs typeface="Arial"/>
-              </a:rPr>
-              <a:t xml:space="preserve">[Self-Preference Bias in</a:t>
+              <a:t xml:space="preserve">Shi et al. (2024), [Judging the Judges:</a:t>
+            </a:r>
+            <a:endParaRPr lang="en-US" sz="1500"/>
+          </a:p>
+          <a:p>
+            <a:pPr marL="0" indent="0">
+              <a:lnSpc>
+                <a:spcPts val="1950"/>
+              </a:lnSpc>
+              <a:spcAft>
+                <a:spcPts val="0"/>
+              </a:spcAft>
+              <a:buNone/>
+            </a:pPr>
+            <a:r>
+              <a:rPr lang="en-US" sz="1500" b="0">
+                <a:solidFill>
+                  <a:srgbClr val="202B33"/>
+                </a:solidFill>
+                <a:latin typeface="Arial"/>
+                <a:ea typeface="Arial"/>
+                <a:cs typeface="Arial"/>
+              </a:rPr>
+              <a:t xml:space="preserve">position bias in pairwise LLM</a:t>
+            </a:r>
+            <a:endParaRPr lang="en-US" sz="1500"/>
+          </a:p>
+          <a:p>
+            <a:pPr marL="0" indent="0">
+              <a:lnSpc>
+                <a:spcPts val="1950"/>
+              </a:lnSpc>
+              <a:spcAft>
+                <a:spcPts val="0"/>
+              </a:spcAft>
+              <a:buNone/>
+            </a:pPr>
+            <a:r>
+              <a:rPr lang="en-US" sz="1500" b="0">
+                <a:solidFill>
+                  <a:srgbClr val="202B33"/>
+                </a:solidFill>
+                <a:latin typeface="Arial"/>
+                <a:ea typeface="Arial"/>
+                <a:cs typeface="Arial"/>
+              </a:rPr>
+              <a:t xml:space="preserve">comparisons](https://arxiv.org/abs/2406.07791).</a:t>
+            </a:r>
+            <a:endParaRPr lang="en-US" sz="1500"/>
+          </a:p>
+          <a:p>
+            <a:pPr marL="0" indent="0">
+              <a:lnSpc>
+                <a:spcPts val="1950"/>
+              </a:lnSpc>
+              <a:spcAft>
+                <a:spcPts val="0"/>
+              </a:spcAft>
+              <a:buNone/>
+            </a:pPr>
+            <a:r>
+              <a:rPr lang="en-US" sz="1500" b="0">
+                <a:solidFill>
+                  <a:srgbClr val="202B33"/>
+                </a:solidFill>
+                <a:latin typeface="Arial"/>
+                <a:ea typeface="Arial"/>
+                <a:cs typeface="Arial"/>
+              </a:rPr>
+              <a:t xml:space="preserve">Wataoka et al. (2024), [Self-Preference</a:t>
+            </a:r>
+            <a:endParaRPr lang="en-US" sz="1500"/>
+          </a:p>
+          <a:p>
+            <a:pPr marL="0" indent="0">
+              <a:lnSpc>
+                <a:spcPts val="1950"/>
+              </a:lnSpc>
+              <a:spcAft>
+                <a:spcPts val="0"/>
+              </a:spcAft>
+              <a:buNone/>
+            </a:pPr>
+            <a:r>
+              <a:rPr lang="en-US" sz="1500" b="0">
+                <a:solidFill>
+                  <a:srgbClr val="202B33"/>
+                </a:solidFill>
+                <a:latin typeface="Arial"/>
+                <a:ea typeface="Arial"/>
+                <a:cs typeface="Arial"/>
+              </a:rPr>
+              <a:t xml:space="preserve">Bias in</a:t>
             </a:r>
             <a:endParaRPr lang="en-US" sz="1500"/>
           </a:p>
@@ -9631,7 +9815,7 @@
                 <a:ea typeface="Arial"/>
                 <a:cs typeface="Arial"/>
               </a:rPr>
-              <a:t xml:space="preserve">A leaderboard, and the question it isn't answering</a:t>
+              <a:t xml:space="preserve">Tuxedo of Benchmarks</a:t>
             </a:r>
             <a:endParaRPr lang="en-US" sz="2550"/>
           </a:p>
@@ -11320,7 +11504,7 @@
                 <a:ea typeface="Arial"/>
                 <a:cs typeface="Arial"/>
               </a:rPr>
-              <a:t xml:space="preserve">Your eval suite is a measuring instrument</a:t>
+              <a:t xml:space="preserve">Your Eval Suite Needs Therapy</a:t>
             </a:r>
             <a:endParaRPr lang="en-US" sz="2550"/>
           </a:p>
@@ -13888,7 +14072,7 @@
                 <a:ea typeface="Arial"/>
                 <a:cs typeface="Arial"/>
               </a:rPr>
-              <a:t xml:space="preserve">Run it five times</a:t>
+              <a:t xml:space="preserve">Run the Judges</a:t>
             </a:r>
             <a:endParaRPr lang="en-US" sz="2550"/>
           </a:p>
@@ -14813,7 +14997,7 @@
                 <a:ea typeface="Arial"/>
                 <a:cs typeface="Arial"/>
               </a:rPr>
-              <a:t xml:space="preserve">Twenty green cases. About one in seven.</a:t>
+              <a:t xml:space="preserve">Twenty for Twenty, One in Seven</a:t>
             </a:r>
             <a:endParaRPr lang="en-US" sz="2550"/>
           </a:p>
@@ -14843,7 +15027,7 @@
       </p:sp>
       <p:pic>
         <p:nvPicPr>
-          <p:cNvPr id="5" name="5d9d88671737e342604a8bb2f8a50f9753e84270f97998346745671bda4153b9" descr="Twenty green cases. About one in seven."/>
+          <p:cNvPr id="5" name="5d9d88671737e342604a8bb2f8a50f9753e84270f97998346745671bda4153b9" descr="Twenty for Twenty, One in Seven"/>
           <p:cNvPicPr>
             <a:picLocks noChangeAspect="1"/>
           </p:cNvPicPr>
@@ -15678,7 +15862,7 @@
                 <a:ea typeface="Arial"/>
                 <a:cs typeface="Arial"/>
               </a:rPr>
-              <a:t xml:space="preserve">Twenty green cases. About one in seven. (continued)</a:t>
+              <a:t xml:space="preserve">Twenty for Twenty, One in Seven (continued)</a:t>
             </a:r>
             <a:endParaRPr lang="en-US" sz="2550"/>
           </a:p>

--- a/artifacts/speaking-portfolio-expanded/decks/benchmarks-15min-handout.pptx
+++ b/artifacts/speaking-portfolio-expanded/decks/benchmarks-15min-handout.pptx
@@ -218,7 +218,7 @@
                 <a:ea typeface="Arial"/>
                 <a:cs typeface="Arial"/>
               </a:rPr>
-              <a:t xml:space="preserve">Source slide 9. 11:00 to 13:30</a:t>
+              <a:t xml:space="preserve">Source slide 9. 11:30 to 13:45</a:t>
             </a:r>
             <a:endParaRPr lang="en-US" sz="1200"/>
           </a:p>
@@ -745,7 +745,7 @@
                 <a:ea typeface="Arial"/>
                 <a:cs typeface="Arial"/>
               </a:rPr>
-              <a:t xml:space="preserve">Source slide 15. 13:30 to 15:00</a:t>
+              <a:t xml:space="preserve">Source slide 15. 13:45 to 15:00</a:t>
             </a:r>
             <a:endParaRPr lang="en-US" sz="1200"/>
           </a:p>
@@ -1728,7 +1728,7 @@
                 <a:ea typeface="Arial"/>
                 <a:cs typeface="Arial"/>
               </a:rPr>
-              <a:t xml:space="preserve">Source slide 1. 00:00 to 01:00</a:t>
+              <a:t xml:space="preserve">Source slide 1. 00:00 to 01:30</a:t>
             </a:r>
             <a:endParaRPr lang="en-US" sz="1200"/>
           </a:p>
@@ -2255,7 +2255,7 @@
                 <a:ea typeface="Arial"/>
                 <a:cs typeface="Arial"/>
               </a:rPr>
-              <a:t xml:space="preserve">Source slide 3. 01:00 to 02:00</a:t>
+              <a:t xml:space="preserve">Source slide 3. 01:30 to 03:00</a:t>
             </a:r>
             <a:endParaRPr lang="en-US" sz="1200"/>
           </a:p>
@@ -2782,7 +2782,7 @@
                 <a:ea typeface="Arial"/>
                 <a:cs typeface="Arial"/>
               </a:rPr>
-              <a:t xml:space="preserve">Source slide 4. 02:00 to 03:00</a:t>
+              <a:t xml:space="preserve">Source slide 4. 03:00 to 04:15</a:t>
             </a:r>
             <a:endParaRPr lang="en-US" sz="1200"/>
           </a:p>
@@ -3263,7 +3263,7 @@
                 <a:ea typeface="Arial"/>
                 <a:cs typeface="Arial"/>
               </a:rPr>
-              <a:t xml:space="preserve">Source slide 5. 03:00 to 04:30</a:t>
+              <a:t xml:space="preserve">Source slide 5. 04:15 to 05:45</a:t>
             </a:r>
             <a:endParaRPr lang="en-US" sz="1200"/>
           </a:p>
@@ -3790,7 +3790,7 @@
                 <a:ea typeface="Arial"/>
                 <a:cs typeface="Arial"/>
               </a:rPr>
-              <a:t xml:space="preserve">Source slide 6. 04:30 to 06:00</a:t>
+              <a:t xml:space="preserve">Source slide 6. 05:45 to 07:15</a:t>
             </a:r>
             <a:endParaRPr lang="en-US" sz="1200"/>
           </a:p>
@@ -4271,7 +4271,7 @@
                 <a:ea typeface="Arial"/>
                 <a:cs typeface="Arial"/>
               </a:rPr>
-              <a:t xml:space="preserve">Source slide 7. 06:00 to 08:00</a:t>
+              <a:t xml:space="preserve">Source slide 7. 07:15 to 09:00</a:t>
             </a:r>
             <a:endParaRPr lang="en-US" sz="1200"/>
           </a:p>
@@ -4844,7 +4844,7 @@
                 <a:ea typeface="Arial"/>
                 <a:cs typeface="Arial"/>
               </a:rPr>
-              <a:t xml:space="preserve">Source slide 8. 08:00 to 11:00</a:t>
+              <a:t xml:space="preserve">Source slide 8. 09:00 to 11:30</a:t>
             </a:r>
             <a:endParaRPr lang="en-US" sz="1200"/>
           </a:p>
@@ -5417,7 +5417,7 @@
                 <a:ea typeface="Arial"/>
                 <a:cs typeface="Arial"/>
               </a:rPr>
-              <a:t xml:space="preserve">Source slide 8. 08:00 to 11:00</a:t>
+              <a:t xml:space="preserve">Source slide 8. 09:00 to 11:30</a:t>
             </a:r>
             <a:endParaRPr lang="en-US" sz="1200"/>
           </a:p>
